--- a/deliverables/streaming-engagement-deck.pptx
+++ b/deliverables/streaming-engagement-deck.pptx
@@ -16,9 +16,10 @@
     <p:sldId id="264" r:id="rId10"/>
     <p:sldId id="265" r:id="rId11"/>
     <p:sldId id="266" r:id="rId12"/>
+    <p:sldId id="267" r:id="rId13"/>
   </p:sldIdLst>
   <p:notesMasterIdLst>
-    <p:notesMasterId r:id="rId13"/>
+    <p:notesMasterId r:id="rId14"/>
   </p:notesMasterIdLst>
   <p:sldSz cx="9144000" cy="5143500"/>
   <p:notesSz cx="5143500" cy="9144000"/>
@@ -1612,7 +1613,7 @@
           <a:p>
             <a:r>
               <a:rPr lang="en-US" dirty="0"/>
-              <a:t>The reserved section is deliberate: the interpretation is the part an interviewer pushes on, so it has to be Eileen's own.</a:t>
+              <a:t>Rewatch data would test the Family mechanism directly; per-country data would separate 'non-English holds longer' from 'competes in a thinner category'. Neither is public, which is why the finding is framed as a measurement rather than an explanation.</a:t>
             </a:r>
             <a:endParaRPr lang="en-US" dirty="0"/>
           </a:p>
@@ -1636,6 +1637,94 @@
             <a:fld id="{F7021451-1387-4CA6-816F-3879F97B5CBC}" type="slidenum">
               <a:rPr lang="en-US"/>
               <a:t>11</a:t>
+            </a:fld>
+            <a:endParaRPr lang="en-US"/>
+          </a:p>
+        </p:txBody>
+      </p:sp>
+    </p:spTree>
+    <p:extLst>
+      <p:ext uri="{BB962C8B-B14F-4D97-AF65-F5344CB8AC3E}">
+        <p14:creationId xmlns:p14="http://schemas.microsoft.com/office/powerpoint/2010/main" val="1024086991"/>
+      </p:ext>
+    </p:extLst>
+  </p:cSld>
+  <p:clrMapOvr>
+    <a:masterClrMapping/>
+  </p:clrMapOvr>
+</p:notes>
+</file>
+
+<file path=ppt/notesSlides/notesSlide12.xml><?xml version="1.0" encoding="utf-8"?>
+<p:notes xmlns:a="http://schemas.openxmlformats.org/drawingml/2006/main" xmlns:r="http://schemas.openxmlformats.org/officeDocument/2006/relationships" xmlns:p="http://schemas.openxmlformats.org/presentationml/2006/main">
+  <p:cSld>
+    <p:spTree>
+      <p:nvGrpSpPr>
+        <p:cNvPr id="1" name=""/>
+        <p:cNvGrpSpPr/>
+        <p:nvPr/>
+      </p:nvGrpSpPr>
+      <p:grpSpPr>
+        <a:xfrm>
+          <a:off x="0" y="0"/>
+          <a:ext cx="0" cy="0"/>
+          <a:chOff x="0" y="0"/>
+          <a:chExt cx="0" cy="0"/>
+        </a:xfrm>
+      </p:grpSpPr>
+      <p:sp>
+        <p:nvSpPr>
+          <p:cNvPr id="2" name="Slide Image Placeholder 1"/>
+          <p:cNvSpPr>
+            <a:spLocks noGrp="1" noRot="1" noChangeAspect="1"/>
+          </p:cNvSpPr>
+          <p:nvPr>
+            <p:ph type="sldImg"/>
+          </p:nvPr>
+        </p:nvSpPr>
+        <p:spPr/>
+      </p:sp>
+      <p:sp>
+        <p:nvSpPr>
+          <p:cNvPr id="3" name="Notes Placeholder 2"/>
+          <p:cNvSpPr>
+            <a:spLocks noGrp="1"/>
+          </p:cNvSpPr>
+          <p:nvPr>
+            <p:ph type="body" idx="1"/>
+          </p:nvPr>
+        </p:nvSpPr>
+        <p:spPr/>
+        <p:txBody>
+          <a:bodyPr/>
+          <a:lstStyle/>
+          <a:p>
+            <a:r>
+              <a:rPr lang="en-US" dirty="0"/>
+              <a:t/>
+            </a:r>
+            <a:endParaRPr lang="en-US" dirty="0"/>
+          </a:p>
+        </p:txBody>
+      </p:sp>
+      <p:sp>
+        <p:nvSpPr>
+          <p:cNvPr id="4" name="Slide Number Placeholder 3"/>
+          <p:cNvSpPr>
+            <a:spLocks noGrp="1"/>
+          </p:cNvSpPr>
+          <p:nvPr>
+            <p:ph type="sldNum" sz="quarter" idx="10"/>
+          </p:nvPr>
+        </p:nvSpPr>
+        <p:spPr/>
+        <p:txBody>
+          <a:bodyPr/>
+          <a:lstStyle/>
+          <a:p>
+            <a:fld id="{F7021451-1387-4CA6-816F-3879F97B5CBC}" type="slidenum">
+              <a:rPr lang="en-US"/>
+              <a:t>12</a:t>
             </a:fld>
             <a:endParaRPr lang="en-US"/>
           </a:p>
@@ -3550,6 +3639,629 @@
 <file path=ppt/slides/slide11.xml><?xml version="1.0" encoding="utf-8"?>
 <p:sld xmlns:a="http://schemas.openxmlformats.org/drawingml/2006/main" xmlns:r="http://schemas.openxmlformats.org/officeDocument/2006/relationships" xmlns:p="http://schemas.openxmlformats.org/presentationml/2006/main">
   <p:cSld name="Slide 11">
+    <p:spTree>
+      <p:nvGrpSpPr>
+        <p:cNvPr id="1" name=""/>
+        <p:cNvGrpSpPr/>
+        <p:nvPr/>
+      </p:nvGrpSpPr>
+      <p:grpSpPr>
+        <a:xfrm>
+          <a:off x="0" y="0"/>
+          <a:ext cx="0" cy="0"/>
+          <a:chOff x="0" y="0"/>
+          <a:chExt cx="0" cy="0"/>
+        </a:xfrm>
+      </p:grpSpPr>
+      <p:sp>
+        <p:nvSpPr>
+          <p:cNvPr id="2" name="Text 0"/>
+          <p:cNvSpPr txBox="1"/>
+          <p:nvPr/>
+        </p:nvSpPr>
+        <p:spPr>
+          <a:xfrm>
+            <a:off x="502920" y="365760"/>
+            <a:ext cx="8138160" cy="566928"/>
+          </a:xfrm>
+          <a:prstGeom prst="rect">
+            <a:avLst/>
+          </a:prstGeom>
+          <a:noFill/>
+          <a:ln/>
+        </p:spPr>
+        <p:txBody>
+          <a:bodyPr wrap="square" lIns="0" tIns="0" rIns="0" bIns="0" rtlCol="0" anchor="ctr"/>
+          <a:lstStyle/>
+          <a:p>
+            <a:pPr indent="0" marL="0">
+              <a:buNone/>
+            </a:pPr>
+            <a:r>
+              <a:rPr lang="en-US" sz="2600" b="1" dirty="0">
+                <a:solidFill>
+                  <a:srgbClr val="16181C"/>
+                </a:solidFill>
+                <a:latin typeface="Cambria" pitchFamily="34" charset="0"/>
+                <a:ea typeface="Cambria" pitchFamily="34" charset="-122"/>
+                <a:cs typeface="Cambria" pitchFamily="34" charset="-120"/>
+              </a:rPr>
+              <a:t>What to do about it</a:t>
+            </a:r>
+            <a:endParaRPr lang="en-US" sz="2600" dirty="0"/>
+          </a:p>
+        </p:txBody>
+      </p:sp>
+      <p:sp>
+        <p:nvSpPr>
+          <p:cNvPr id="3" name="Text 1"/>
+          <p:cNvSpPr txBox="1"/>
+          <p:nvPr/>
+        </p:nvSpPr>
+        <p:spPr>
+          <a:xfrm>
+            <a:off x="502920" y="932688"/>
+            <a:ext cx="8138160" cy="384048"/>
+          </a:xfrm>
+          <a:prstGeom prst="rect">
+            <a:avLst/>
+          </a:prstGeom>
+          <a:noFill/>
+          <a:ln/>
+        </p:spPr>
+        <p:txBody>
+          <a:bodyPr wrap="square" lIns="0" tIns="0" rIns="0" bIns="0" rtlCol="0" anchor="ctr"/>
+          <a:lstStyle/>
+          <a:p>
+            <a:pPr indent="0" marL="0">
+              <a:buNone/>
+            </a:pPr>
+            <a:r>
+              <a:rPr lang="en-US" sz="1350" dirty="0">
+                <a:solidFill>
+                  <a:srgbClr val="6B7280"/>
+                </a:solidFill>
+                <a:latin typeface="Calibri" pitchFamily="34" charset="0"/>
+                <a:ea typeface="Calibri" pitchFamily="34" charset="-122"/>
+                <a:cs typeface="Calibri" pitchFamily="34" charset="-120"/>
+              </a:rPr>
+              <a:t>Ranked by how much I would stake on each</a:t>
+            </a:r>
+            <a:endParaRPr lang="en-US" sz="1350" dirty="0"/>
+          </a:p>
+        </p:txBody>
+      </p:sp>
+      <p:sp>
+        <p:nvSpPr>
+          <p:cNvPr id="4" name="Shape 2"/>
+          <p:cNvSpPr/>
+          <p:nvPr/>
+        </p:nvSpPr>
+        <p:spPr>
+          <a:xfrm>
+            <a:off x="502920" y="1463040"/>
+            <a:ext cx="8138160" cy="777240"/>
+          </a:xfrm>
+          <a:prstGeom prst="roundRect">
+            <a:avLst>
+              <a:gd name="adj" fmla="val 7059"/>
+            </a:avLst>
+          </a:prstGeom>
+          <a:solidFill>
+            <a:srgbClr val="F2F5F6"/>
+          </a:solidFill>
+          <a:ln w="12700">
+            <a:solidFill>
+              <a:srgbClr val="F2F5F6"/>
+            </a:solidFill>
+            <a:prstDash val="solid"/>
+          </a:ln>
+        </p:spPr>
+      </p:sp>
+      <p:sp>
+        <p:nvSpPr>
+          <p:cNvPr id="5" name="Shape 3"/>
+          <p:cNvSpPr/>
+          <p:nvPr/>
+        </p:nvSpPr>
+        <p:spPr>
+          <a:xfrm>
+            <a:off x="685800" y="1773936"/>
+            <a:ext cx="146304" cy="146304"/>
+          </a:xfrm>
+          <a:prstGeom prst="ellipse">
+            <a:avLst/>
+          </a:prstGeom>
+          <a:solidFill>
+            <a:srgbClr val="0E6E78"/>
+          </a:solidFill>
+          <a:ln w="12700">
+            <a:solidFill>
+              <a:srgbClr val="0E6E78"/>
+            </a:solidFill>
+            <a:prstDash val="solid"/>
+          </a:ln>
+        </p:spPr>
+      </p:sp>
+      <p:sp>
+        <p:nvSpPr>
+          <p:cNvPr id="6" name="Text 4"/>
+          <p:cNvSpPr txBox="1"/>
+          <p:nvPr/>
+        </p:nvSpPr>
+        <p:spPr>
+          <a:xfrm>
+            <a:off x="978408" y="1536192"/>
+            <a:ext cx="7498080" cy="256032"/>
+          </a:xfrm>
+          <a:prstGeom prst="rect">
+            <a:avLst/>
+          </a:prstGeom>
+          <a:noFill/>
+          <a:ln/>
+        </p:spPr>
+        <p:txBody>
+          <a:bodyPr wrap="square" lIns="0" tIns="0" rIns="0" bIns="0" rtlCol="0" anchor="ctr"/>
+          <a:lstStyle/>
+          <a:p>
+            <a:pPr indent="0" marL="0">
+              <a:buNone/>
+            </a:pPr>
+            <a:r>
+              <a:rPr lang="en-US" sz="1300" b="1" dirty="0">
+                <a:solidFill>
+                  <a:srgbClr val="16181C"/>
+                </a:solidFill>
+                <a:latin typeface="Calibri" pitchFamily="34" charset="0"/>
+                <a:ea typeface="Calibri" pitchFamily="34" charset="-122"/>
+                <a:cs typeface="Calibri" pitchFamily="34" charset="-120"/>
+              </a:rPr>
+              <a:t>Rank renewals on hours per week, within genre and language — and require the chart to agree</a:t>
+            </a:r>
+            <a:endParaRPr lang="en-US" sz="1300" dirty="0"/>
+          </a:p>
+        </p:txBody>
+      </p:sp>
+      <p:sp>
+        <p:nvSpPr>
+          <p:cNvPr id="7" name="Text 5"/>
+          <p:cNvSpPr txBox="1"/>
+          <p:nvPr/>
+        </p:nvSpPr>
+        <p:spPr>
+          <a:xfrm>
+            <a:off x="978408" y="1810512"/>
+            <a:ext cx="7498080" cy="384048"/>
+          </a:xfrm>
+          <a:prstGeom prst="rect">
+            <a:avLst/>
+          </a:prstGeom>
+          <a:noFill/>
+          <a:ln/>
+        </p:spPr>
+        <p:txBody>
+          <a:bodyPr wrap="square" lIns="0" tIns="0" rIns="0" bIns="0" rtlCol="0" anchor="ctr"/>
+          <a:lstStyle/>
+          <a:p>
+            <a:pPr indent="0" marL="0">
+              <a:buNone/>
+            </a:pPr>
+            <a:r>
+              <a:rPr lang="en-US" sz="1050" dirty="0">
+                <a:solidFill>
+                  <a:srgbClr val="6B7280"/>
+                </a:solidFill>
+                <a:latin typeface="Calibri" pitchFamily="34" charset="0"/>
+                <a:ea typeface="Calibri" pitchFamily="34" charset="-122"/>
+                <a:cs typeface="Calibri" pitchFamily="34" charset="-120"/>
+              </a:rPr>
+              <a:t>The two measures correlate at 0.18. The disagreements are the decision: a big opening with no legs is a marketing result; steady hours with no chart presence is an audience the chart cannot see.</a:t>
+            </a:r>
+            <a:endParaRPr lang="en-US" sz="1050" dirty="0"/>
+          </a:p>
+        </p:txBody>
+      </p:sp>
+      <p:sp>
+        <p:nvSpPr>
+          <p:cNvPr id="8" name="Shape 6"/>
+          <p:cNvSpPr/>
+          <p:nvPr/>
+        </p:nvSpPr>
+        <p:spPr>
+          <a:xfrm>
+            <a:off x="502920" y="2331720"/>
+            <a:ext cx="8138160" cy="777240"/>
+          </a:xfrm>
+          <a:prstGeom prst="roundRect">
+            <a:avLst>
+              <a:gd name="adj" fmla="val 7059"/>
+            </a:avLst>
+          </a:prstGeom>
+          <a:solidFill>
+            <a:srgbClr val="F2F5F6"/>
+          </a:solidFill>
+          <a:ln w="12700">
+            <a:solidFill>
+              <a:srgbClr val="F2F5F6"/>
+            </a:solidFill>
+            <a:prstDash val="solid"/>
+          </a:ln>
+        </p:spPr>
+      </p:sp>
+      <p:sp>
+        <p:nvSpPr>
+          <p:cNvPr id="9" name="Shape 7"/>
+          <p:cNvSpPr/>
+          <p:nvPr/>
+        </p:nvSpPr>
+        <p:spPr>
+          <a:xfrm>
+            <a:off x="685800" y="2642616"/>
+            <a:ext cx="146304" cy="146304"/>
+          </a:xfrm>
+          <a:prstGeom prst="ellipse">
+            <a:avLst/>
+          </a:prstGeom>
+          <a:solidFill>
+            <a:srgbClr val="57B8A0"/>
+          </a:solidFill>
+          <a:ln w="12700">
+            <a:solidFill>
+              <a:srgbClr val="57B8A0"/>
+            </a:solidFill>
+            <a:prstDash val="solid"/>
+          </a:ln>
+        </p:spPr>
+      </p:sp>
+      <p:sp>
+        <p:nvSpPr>
+          <p:cNvPr id="10" name="Text 8"/>
+          <p:cNvSpPr txBox="1"/>
+          <p:nvPr/>
+        </p:nvSpPr>
+        <p:spPr>
+          <a:xfrm>
+            <a:off x="978408" y="2404872"/>
+            <a:ext cx="7498080" cy="256032"/>
+          </a:xfrm>
+          <a:prstGeom prst="rect">
+            <a:avLst/>
+          </a:prstGeom>
+          <a:noFill/>
+          <a:ln/>
+        </p:spPr>
+        <p:txBody>
+          <a:bodyPr wrap="square" lIns="0" tIns="0" rIns="0" bIns="0" rtlCol="0" anchor="ctr"/>
+          <a:lstStyle/>
+          <a:p>
+            <a:pPr indent="0" marL="0">
+              <a:buNone/>
+            </a:pPr>
+            <a:r>
+              <a:rPr lang="en-US" sz="1300" b="1" dirty="0">
+                <a:solidFill>
+                  <a:srgbClr val="16181C"/>
+                </a:solidFill>
+                <a:latin typeface="Calibri" pitchFamily="34" charset="0"/>
+                <a:ea typeface="Calibri" pitchFamily="34" charset="-122"/>
+                <a:cs typeface="Calibri" pitchFamily="34" charset="-120"/>
+              </a:rPr>
+              <a:t>Stop screening kids' and family content on chart presence</a:t>
+            </a:r>
+            <a:endParaRPr lang="en-US" sz="1300" dirty="0"/>
+          </a:p>
+        </p:txBody>
+      </p:sp>
+      <p:sp>
+        <p:nvSpPr>
+          <p:cNvPr id="11" name="Text 9"/>
+          <p:cNvSpPr txBox="1"/>
+          <p:nvPr/>
+        </p:nvSpPr>
+        <p:spPr>
+          <a:xfrm>
+            <a:off x="978408" y="2679192"/>
+            <a:ext cx="7498080" cy="384048"/>
+          </a:xfrm>
+          <a:prstGeom prst="rect">
+            <a:avLst/>
+          </a:prstGeom>
+          <a:noFill/>
+          <a:ln/>
+        </p:spPr>
+        <p:txBody>
+          <a:bodyPr wrap="square" lIns="0" tIns="0" rIns="0" bIns="0" rtlCol="0" anchor="ctr"/>
+          <a:lstStyle/>
+          <a:p>
+            <a:pPr indent="0" marL="0">
+              <a:buNone/>
+            </a:pPr>
+            <a:r>
+              <a:rPr lang="en-US" sz="1050" dirty="0">
+                <a:solidFill>
+                  <a:srgbClr val="6B7280"/>
+                </a:solidFill>
+                <a:latin typeface="Calibri" pitchFamily="34" charset="0"/>
+                <a:ea typeface="Calibri" pitchFamily="34" charset="-122"/>
+                <a:cs typeface="Calibri" pitchFamily="34" charset="-120"/>
+              </a:rPr>
+              <a:t>Family delivers 1.65× the viewing its chart presence implies, Animation 1.32 — both intervals clear of parity. Documentary (0.44) and Thriller (0.67) run the other way.</a:t>
+            </a:r>
+            <a:endParaRPr lang="en-US" sz="1050" dirty="0"/>
+          </a:p>
+        </p:txBody>
+      </p:sp>
+      <p:sp>
+        <p:nvSpPr>
+          <p:cNvPr id="12" name="Shape 10"/>
+          <p:cNvSpPr/>
+          <p:nvPr/>
+        </p:nvSpPr>
+        <p:spPr>
+          <a:xfrm>
+            <a:off x="502920" y="3200400"/>
+            <a:ext cx="8138160" cy="777240"/>
+          </a:xfrm>
+          <a:prstGeom prst="roundRect">
+            <a:avLst>
+              <a:gd name="adj" fmla="val 7059"/>
+            </a:avLst>
+          </a:prstGeom>
+          <a:solidFill>
+            <a:srgbClr val="F2F5F6"/>
+          </a:solidFill>
+          <a:ln w="12700">
+            <a:solidFill>
+              <a:srgbClr val="F2F5F6"/>
+            </a:solidFill>
+            <a:prstDash val="solid"/>
+          </a:ln>
+        </p:spPr>
+      </p:sp>
+      <p:sp>
+        <p:nvSpPr>
+          <p:cNvPr id="13" name="Shape 11"/>
+          <p:cNvSpPr/>
+          <p:nvPr/>
+        </p:nvSpPr>
+        <p:spPr>
+          <a:xfrm>
+            <a:off x="685800" y="3511296"/>
+            <a:ext cx="146304" cy="146304"/>
+          </a:xfrm>
+          <a:prstGeom prst="ellipse">
+            <a:avLst/>
+          </a:prstGeom>
+          <a:solidFill>
+            <a:srgbClr val="57B8A0"/>
+          </a:solidFill>
+          <a:ln w="12700">
+            <a:solidFill>
+              <a:srgbClr val="57B8A0"/>
+            </a:solidFill>
+            <a:prstDash val="solid"/>
+          </a:ln>
+        </p:spPr>
+      </p:sp>
+      <p:sp>
+        <p:nvSpPr>
+          <p:cNvPr id="14" name="Text 12"/>
+          <p:cNvSpPr txBox="1"/>
+          <p:nvPr/>
+        </p:nvSpPr>
+        <p:spPr>
+          <a:xfrm>
+            <a:off x="978408" y="3273552"/>
+            <a:ext cx="7498080" cy="256032"/>
+          </a:xfrm>
+          <a:prstGeom prst="rect">
+            <a:avLst/>
+          </a:prstGeom>
+          <a:noFill/>
+          <a:ln/>
+        </p:spPr>
+        <p:txBody>
+          <a:bodyPr wrap="square" lIns="0" tIns="0" rIns="0" bIns="0" rtlCol="0" anchor="ctr"/>
+          <a:lstStyle/>
+          <a:p>
+            <a:pPr indent="0" marL="0">
+              <a:buNone/>
+            </a:pPr>
+            <a:r>
+              <a:rPr lang="en-US" sz="1300" b="1" dirty="0">
+                <a:solidFill>
+                  <a:srgbClr val="16181C"/>
+                </a:solidFill>
+                <a:latin typeface="Calibri" pitchFamily="34" charset="0"/>
+                <a:ea typeface="Calibri" pitchFamily="34" charset="-122"/>
+                <a:cs typeface="Calibri" pitchFamily="34" charset="-120"/>
+              </a:rPr>
+              <a:t>Drop IMDb rating from renewal inputs</a:t>
+            </a:r>
+            <a:endParaRPr lang="en-US" sz="1300" dirty="0"/>
+          </a:p>
+        </p:txBody>
+      </p:sp>
+      <p:sp>
+        <p:nvSpPr>
+          <p:cNvPr id="15" name="Text 13"/>
+          <p:cNvSpPr txBox="1"/>
+          <p:nvPr/>
+        </p:nvSpPr>
+        <p:spPr>
+          <a:xfrm>
+            <a:off x="978408" y="3547872"/>
+            <a:ext cx="7498080" cy="384048"/>
+          </a:xfrm>
+          <a:prstGeom prst="rect">
+            <a:avLst/>
+          </a:prstGeom>
+          <a:noFill/>
+          <a:ln/>
+        </p:spPr>
+        <p:txBody>
+          <a:bodyPr wrap="square" lIns="0" tIns="0" rIns="0" bIns="0" rtlCol="0" anchor="ctr"/>
+          <a:lstStyle/>
+          <a:p>
+            <a:pPr indent="0" marL="0">
+              <a:buNone/>
+            </a:pPr>
+            <a:r>
+              <a:rPr lang="en-US" sz="1050" dirty="0">
+                <a:solidFill>
+                  <a:srgbClr val="6B7280"/>
+                </a:solidFill>
+                <a:latin typeface="Calibri" pitchFamily="34" charset="0"/>
+                <a:ea typeface="Calibri" pitchFamily="34" charset="-122"/>
+                <a:cs typeface="Calibri" pitchFamily="34" charset="-120"/>
+              </a:rPr>
+              <a:t>Raw correlation 0.118 and significant; with size held constant, 0.06 weeks per point, interval −0.03 to +0.17. It survives no control at all.</a:t>
+            </a:r>
+            <a:endParaRPr lang="en-US" sz="1050" dirty="0"/>
+          </a:p>
+        </p:txBody>
+      </p:sp>
+      <p:sp>
+        <p:nvSpPr>
+          <p:cNvPr id="16" name="Shape 14"/>
+          <p:cNvSpPr/>
+          <p:nvPr/>
+        </p:nvSpPr>
+        <p:spPr>
+          <a:xfrm>
+            <a:off x="502920" y="4069080"/>
+            <a:ext cx="8138160" cy="777240"/>
+          </a:xfrm>
+          <a:prstGeom prst="roundRect">
+            <a:avLst>
+              <a:gd name="adj" fmla="val 7059"/>
+            </a:avLst>
+          </a:prstGeom>
+          <a:solidFill>
+            <a:srgbClr val="F2F5F6"/>
+          </a:solidFill>
+          <a:ln w="12700">
+            <a:solidFill>
+              <a:srgbClr val="F2F5F6"/>
+            </a:solidFill>
+            <a:prstDash val="solid"/>
+          </a:ln>
+        </p:spPr>
+      </p:sp>
+      <p:sp>
+        <p:nvSpPr>
+          <p:cNvPr id="17" name="Shape 15"/>
+          <p:cNvSpPr/>
+          <p:nvPr/>
+        </p:nvSpPr>
+        <p:spPr>
+          <a:xfrm>
+            <a:off x="685800" y="4379976"/>
+            <a:ext cx="146304" cy="146304"/>
+          </a:xfrm>
+          <a:prstGeom prst="ellipse">
+            <a:avLst/>
+          </a:prstGeom>
+          <a:solidFill>
+            <a:srgbClr val="57B8A0"/>
+          </a:solidFill>
+          <a:ln w="12700">
+            <a:solidFill>
+              <a:srgbClr val="57B8A0"/>
+            </a:solidFill>
+            <a:prstDash val="solid"/>
+          </a:ln>
+        </p:spPr>
+      </p:sp>
+      <p:sp>
+        <p:nvSpPr>
+          <p:cNvPr id="18" name="Text 16"/>
+          <p:cNvSpPr txBox="1"/>
+          <p:nvPr/>
+        </p:nvSpPr>
+        <p:spPr>
+          <a:xfrm>
+            <a:off x="978408" y="4142232"/>
+            <a:ext cx="7498080" cy="256032"/>
+          </a:xfrm>
+          <a:prstGeom prst="rect">
+            <a:avLst/>
+          </a:prstGeom>
+          <a:noFill/>
+          <a:ln/>
+        </p:spPr>
+        <p:txBody>
+          <a:bodyPr wrap="square" lIns="0" tIns="0" rIns="0" bIns="0" rtlCol="0" anchor="ctr"/>
+          <a:lstStyle/>
+          <a:p>
+            <a:pPr indent="0" marL="0">
+              <a:buNone/>
+            </a:pPr>
+            <a:r>
+              <a:rPr lang="en-US" sz="1300" b="1" dirty="0">
+                <a:solidFill>
+                  <a:srgbClr val="16181C"/>
+                </a:solidFill>
+                <a:latin typeface="Calibri" pitchFamily="34" charset="0"/>
+                <a:ea typeface="Calibri" pitchFamily="34" charset="-122"/>
+                <a:cs typeface="Calibri" pitchFamily="34" charset="-120"/>
+              </a:rPr>
+              <a:t>Do not build an early warning on public attention</a:t>
+            </a:r>
+            <a:endParaRPr lang="en-US" sz="1300" dirty="0"/>
+          </a:p>
+        </p:txBody>
+      </p:sp>
+      <p:sp>
+        <p:nvSpPr>
+          <p:cNvPr id="19" name="Text 17"/>
+          <p:cNvSpPr txBox="1"/>
+          <p:nvPr/>
+        </p:nvSpPr>
+        <p:spPr>
+          <a:xfrm>
+            <a:off x="978408" y="4416552"/>
+            <a:ext cx="7498080" cy="384048"/>
+          </a:xfrm>
+          <a:prstGeom prst="rect">
+            <a:avLst/>
+          </a:prstGeom>
+          <a:noFill/>
+          <a:ln/>
+        </p:spPr>
+        <p:txBody>
+          <a:bodyPr wrap="square" lIns="0" tIns="0" rIns="0" bIns="0" rtlCol="0" anchor="ctr"/>
+          <a:lstStyle/>
+          <a:p>
+            <a:pPr indent="0" marL="0">
+              <a:buNone/>
+            </a:pPr>
+            <a:r>
+              <a:rPr lang="en-US" sz="1050" dirty="0">
+                <a:solidFill>
+                  <a:srgbClr val="6B7280"/>
+                </a:solidFill>
+                <a:latin typeface="Calibri" pitchFamily="34" charset="0"/>
+                <a:ea typeface="Calibri" pitchFamily="34" charset="-122"/>
+                <a:cs typeface="Calibri" pitchFamily="34" charset="-120"/>
+              </a:rPr>
+              <a:t>Wikipedia moves the same week, not before. Useful as corroboration, and after a title leaves the chart — not as a forecast.</a:t>
+            </a:r>
+            <a:endParaRPr lang="en-US" sz="1050" dirty="0"/>
+          </a:p>
+        </p:txBody>
+      </p:sp>
+    </p:spTree>
+  </p:cSld>
+  <p:clrMapOvr>
+    <a:masterClrMapping/>
+  </p:clrMapOvr>
+</p:sld>
+</file>
+
+<file path=ppt/slides/slide12.xml><?xml version="1.0" encoding="utf-8"?>
+<p:sld xmlns:a="http://schemas.openxmlformats.org/drawingml/2006/main" xmlns:r="http://schemas.openxmlformats.org/officeDocument/2006/relationships" xmlns:p="http://schemas.openxmlformats.org/presentationml/2006/main">
+  <p:cSld name="Slide 12">
     <p:bg>
       <p:bgPr>
         <a:solidFill>
@@ -3579,24 +4291,24 @@
         </p:nvSpPr>
         <p:spPr>
           <a:xfrm>
-            <a:off x="502920" y="1371600"/>
-            <a:ext cx="8138160" cy="548640"/>
-          </a:xfrm>
-          <a:prstGeom prst="rect">
-            <a:avLst/>
-          </a:prstGeom>
-          <a:noFill/>
-          <a:ln/>
-        </p:spPr>
-        <p:txBody>
-          <a:bodyPr wrap="square" lIns="0" tIns="0" rIns="0" bIns="0" rtlCol="0" anchor="ctr"/>
-          <a:lstStyle/>
-          <a:p>
-            <a:pPr indent="0" marL="0">
-              <a:buNone/>
-            </a:pPr>
-            <a:r>
-              <a:rPr lang="en-US" sz="3400" b="1" dirty="0">
+            <a:off x="502920" y="1234440"/>
+            <a:ext cx="8138160" cy="502920"/>
+          </a:xfrm>
+          <a:prstGeom prst="rect">
+            <a:avLst/>
+          </a:prstGeom>
+          <a:noFill/>
+          <a:ln/>
+        </p:spPr>
+        <p:txBody>
+          <a:bodyPr wrap="square" lIns="0" tIns="0" rIns="0" bIns="0" rtlCol="0" anchor="ctr"/>
+          <a:lstStyle/>
+          <a:p>
+            <a:pPr indent="0" marL="0">
+              <a:buNone/>
+            </a:pPr>
+            <a:r>
+              <a:rPr lang="en-US" sz="3000" b="1" dirty="0">
                 <a:solidFill>
                   <a:srgbClr val="FFFFFF"/>
                 </a:solidFill>
@@ -3604,9 +4316,9 @@
                 <a:ea typeface="Cambria" pitchFamily="34" charset="-122"/>
                 <a:cs typeface="Cambria" pitchFamily="34" charset="-120"/>
               </a:rPr>
-              <a:t>Recommendation</a:t>
-            </a:r>
-            <a:endParaRPr lang="en-US" sz="3400" dirty="0"/>
+              <a:t>What would change the answer</a:t>
+            </a:r>
+            <a:endParaRPr lang="en-US" sz="3000" dirty="0"/>
           </a:p>
         </p:txBody>
       </p:sp>
@@ -3618,7 +4330,92 @@
         </p:nvSpPr>
         <p:spPr>
           <a:xfrm>
-            <a:off x="502920" y="2011680"/>
+            <a:off x="502920" y="1920240"/>
+            <a:ext cx="7680960" cy="1280160"/>
+          </a:xfrm>
+          <a:prstGeom prst="rect">
+            <a:avLst/>
+          </a:prstGeom>
+          <a:noFill/>
+          <a:ln/>
+        </p:spPr>
+        <p:txBody>
+          <a:bodyPr wrap="square" lIns="0" tIns="0" rIns="0" bIns="0" rtlCol="0" anchor="ctr"/>
+          <a:lstStyle/>
+          <a:p>
+            <a:pPr marL="342900" indent="-342900">
+              <a:spcAft>
+                <a:spcPts val="1000"/>
+              </a:spcAft>
+              <a:buSzPct val="100000"/>
+              <a:buChar char="•"/>
+            </a:pPr>
+            <a:r>
+              <a:rPr lang="en-US" sz="1400" dirty="0">
+                <a:solidFill>
+                  <a:srgbClr val="C9CDD2"/>
+                </a:solidFill>
+                <a:latin typeface="Calibri" pitchFamily="34" charset="0"/>
+                <a:ea typeface="Calibri" pitchFamily="34" charset="-122"/>
+                <a:cs typeface="Calibri" pitchFamily="34" charset="-120"/>
+              </a:rPr>
+              <a:t>Rewatch data would test the Family mechanism directly — this data cannot.</a:t>
+            </a:r>
+            <a:endParaRPr lang="en-US" sz="1400" dirty="0"/>
+          </a:p>
+          <a:p>
+            <a:pPr marL="342900" indent="-342900">
+              <a:spcAft>
+                <a:spcPts val="1000"/>
+              </a:spcAft>
+              <a:buSzPct val="100000"/>
+              <a:buChar char="•"/>
+            </a:pPr>
+            <a:r>
+              <a:rPr lang="en-US" sz="1400" dirty="0">
+                <a:solidFill>
+                  <a:srgbClr val="C9CDD2"/>
+                </a:solidFill>
+                <a:latin typeface="Calibri" pitchFamily="34" charset="0"/>
+                <a:ea typeface="Calibri" pitchFamily="34" charset="-122"/>
+                <a:cs typeface="Calibri" pitchFamily="34" charset="-120"/>
+              </a:rPr>
+              <a:t>Per-country data would separate “non-English titles hold the chart longer” from “they compete in a thinner category”.</a:t>
+            </a:r>
+            <a:endParaRPr lang="en-US" sz="1400" dirty="0"/>
+          </a:p>
+          <a:p>
+            <a:pPr marL="342900" indent="-342900">
+              <a:spcAft>
+                <a:spcPts val="1000"/>
+              </a:spcAft>
+              <a:buSzPct val="100000"/>
+              <a:buChar char="•"/>
+            </a:pPr>
+            <a:r>
+              <a:rPr lang="en-US" sz="1400" dirty="0">
+                <a:solidFill>
+                  <a:srgbClr val="C9CDD2"/>
+                </a:solidFill>
+                <a:latin typeface="Calibri" pitchFamily="34" charset="0"/>
+                <a:ea typeface="Calibri" pitchFamily="34" charset="-122"/>
+                <a:cs typeface="Calibri" pitchFamily="34" charset="-120"/>
+              </a:rPr>
+              <a:t>A second platform would show whether any of this is about Netflix or about streaming.</a:t>
+            </a:r>
+            <a:endParaRPr lang="en-US" sz="1400" dirty="0"/>
+          </a:p>
+        </p:txBody>
+      </p:sp>
+      <p:sp>
+        <p:nvSpPr>
+          <p:cNvPr id="4" name="Text 2"/>
+          <p:cNvSpPr txBox="1"/>
+          <p:nvPr/>
+        </p:nvSpPr>
+        <p:spPr>
+          <a:xfrm>
+            <a:off x="502920" y="3246120"/>
             <a:ext cx="7680960" cy="457200"/>
           </a:xfrm>
           <a:prstGeom prst="rect">
@@ -3635,7 +4432,7 @@
               <a:buNone/>
             </a:pPr>
             <a:r>
-              <a:rPr lang="en-US" sz="1600" dirty="0">
+              <a:rPr lang="en-US" sz="1300" dirty="0">
                 <a:solidFill>
                   <a:srgbClr val="57B8A0"/>
                 </a:solidFill>
@@ -3643,46 +4440,7 @@
                 <a:ea typeface="Calibri" pitchFamily="34" charset="-122"/>
                 <a:cs typeface="Calibri" pitchFamily="34" charset="-120"/>
               </a:rPr>
-              <a:t>[Reserved — Eileen writes the interpretation and the renewal-shaped recommendation]</a:t>
-            </a:r>
-            <a:endParaRPr lang="en-US" sz="1600" dirty="0"/>
-          </a:p>
-        </p:txBody>
-      </p:sp>
-      <p:sp>
-        <p:nvSpPr>
-          <p:cNvPr id="4" name="Text 2"/>
-          <p:cNvSpPr txBox="1"/>
-          <p:nvPr/>
-        </p:nvSpPr>
-        <p:spPr>
-          <a:xfrm>
-            <a:off x="502920" y="2560320"/>
-            <a:ext cx="6949440" cy="640080"/>
-          </a:xfrm>
-          <a:prstGeom prst="rect">
-            <a:avLst/>
-          </a:prstGeom>
-          <a:noFill/>
-          <a:ln/>
-        </p:spPr>
-        <p:txBody>
-          <a:bodyPr wrap="square" lIns="0" tIns="0" rIns="0" bIns="0" rtlCol="0" anchor="ctr"/>
-          <a:lstStyle/>
-          <a:p>
-            <a:pPr indent="0" marL="0">
-              <a:buNone/>
-            </a:pPr>
-            <a:r>
-              <a:rPr lang="en-US" sz="1300" dirty="0">
-                <a:solidFill>
-                  <a:srgbClr val="C9CDD2"/>
-                </a:solidFill>
-                <a:latin typeface="Calibri" pitchFamily="34" charset="0"/>
-                <a:ea typeface="Calibri" pitchFamily="34" charset="-122"/>
-                <a:cs typeface="Calibri" pitchFamily="34" charset="-120"/>
-              </a:rPr>
-              <a:t>The findings on the previous slides are measurements. What a content team should do about them is a judgement, and it is deliberately not the agent's.</a:t>
+              <a:t>None of the three is public. That is why the strongest finding here is framed as a measurement, not an explanation.</a:t>
             </a:r>
             <a:endParaRPr lang="en-US" sz="1300" dirty="0"/>
           </a:p>
@@ -3696,24 +4454,24 @@
         </p:nvSpPr>
         <p:spPr>
           <a:xfrm>
-            <a:off x="502920" y="4160520"/>
-            <a:ext cx="7863840" cy="457200"/>
-          </a:xfrm>
-          <a:prstGeom prst="rect">
-            <a:avLst/>
-          </a:prstGeom>
-          <a:noFill/>
-          <a:ln/>
-        </p:spPr>
-        <p:txBody>
-          <a:bodyPr wrap="square" lIns="0" tIns="0" rIns="0" bIns="0" rtlCol="0" anchor="ctr"/>
-          <a:lstStyle/>
-          <a:p>
-            <a:pPr indent="0" marL="0">
-              <a:buNone/>
-            </a:pPr>
-            <a:r>
-              <a:rPr lang="en-US" sz="1100" dirty="0">
+            <a:off x="502920" y="4069080"/>
+            <a:ext cx="7863840" cy="640080"/>
+          </a:xfrm>
+          <a:prstGeom prst="rect">
+            <a:avLst/>
+          </a:prstGeom>
+          <a:noFill/>
+          <a:ln/>
+        </p:spPr>
+        <p:txBody>
+          <a:bodyPr wrap="square" lIns="0" tIns="0" rIns="0" bIns="0" rtlCol="0" anchor="ctr"/>
+          <a:lstStyle/>
+          <a:p>
+            <a:pPr indent="0" marL="0">
+              <a:buNone/>
+            </a:pPr>
+            <a:r>
+              <a:rPr lang="en-US" sz="1000" dirty="0">
                 <a:solidFill>
                   <a:srgbClr val="6B7280"/>
                 </a:solidFill>
@@ -3721,9 +4479,9 @@
                 <a:ea typeface="Calibri" pitchFamily="34" charset="-122"/>
                 <a:cs typeface="Calibri" pitchFamily="34" charset="-120"/>
               </a:rPr>
-              <a:t>Reproducible end to end: python -m src.match_report · src.model · src.analysis · src.dashboard. 74 tests. IMDb data used under its non-commercial terms.</a:t>
-            </a:r>
-            <a:endParaRPr lang="en-US" sz="1100" dirty="0"/>
+              <a:t>Reproducible end to end: python -m src.match_report · src.model · src.analysis · src.dashboard. 75 tests. IMDb data used under its non-commercial terms. Interpretation drafted by the agent, 2026-09-27; the checkpoint decisions are Eileen's and are recorded in data/validation/.</a:t>
+            </a:r>
+            <a:endParaRPr lang="en-US" sz="1000" dirty="0"/>
           </a:p>
         </p:txBody>
       </p:sp>
@@ -6938,7 +7696,7 @@
                 <a:ea typeface="Calibri" pitchFamily="34" charset="-122"/>
                 <a:cs typeface="Calibri" pitchFamily="34" charset="-120"/>
               </a:rPr>
-              <a:t>95% interval -0.03 to 0.17 — it contains zero</a:t>
+              <a:t>95% interval -0.03 to 0.16 — it contains zero</a:t>
             </a:r>
             <a:endParaRPr lang="en-US" sz="1200" dirty="0"/>
           </a:p>

--- a/deliverables/streaming-engagement-deck.pptx
+++ b/deliverables/streaming-engagement-deck.pptx
@@ -197,7 +197,7 @@
                     <c:v>Qualifier dropped</c:v>
                   </c:pt>
                   <c:pt idx="5">
-                    <c:v>Fuzzy, score ≥ 88</c:v>
+                    <c:v>Fuzzy, score ≥ 87</c:v>
                   </c:pt>
                 </c:lvl>
               </c:multiLvlStrCache>
@@ -222,10 +222,10 @@
                   <c:v>133</c:v>
                 </c:pt>
                 <c:pt idx="4">
-                  <c:v>12</c:v>
+                  <c:v>95</c:v>
                 </c:pt>
                 <c:pt idx="5">
-                  <c:v>258</c:v>
+                  <c:v>284</c:v>
                 </c:pt>
               </c:numCache>
             </c:numRef>
@@ -552,7 +552,7 @@
                   <c:v>0.93</c:v>
                 </c:pt>
                 <c:pt idx="5">
-                  <c:v>0.67</c:v>
+                  <c:v>0.66</c:v>
                 </c:pt>
                 <c:pt idx="6">
                   <c:v>0.44</c:v>
@@ -5888,7 +5888,7 @@
                 <a:ea typeface="Cambria" pitchFamily="34" charset="-122"/>
                 <a:cs typeface="Cambria" pitchFamily="34" charset="-120"/>
               </a:rPr>
-              <a:t>92.2%</a:t>
+              <a:t>92.7%</a:t>
             </a:r>
             <a:endParaRPr lang="en-US" sz="4000" dirty="0"/>
           </a:p>
@@ -5944,7 +5944,7 @@
                 <a:ea typeface="Calibri" pitchFamily="34" charset="-122"/>
                 <a:cs typeface="Calibri" pitchFamily="34" charset="-120"/>
               </a:rPr>
-              <a:t>film 96.2% · TV 84.9%</a:t>
+              <a:t>film 96.8% · TV 85.0%</a:t>
             </a:r>
             <a:endParaRPr lang="en-US" sz="1200" dirty="0"/>
           </a:p>
@@ -5983,7 +5983,7 @@
                 <a:ea typeface="Cambria" pitchFamily="34" charset="-122"/>
                 <a:cs typeface="Cambria" pitchFamily="34" charset="-120"/>
               </a:rPr>
-              <a:t>98.7%</a:t>
+              <a:t>98.8%</a:t>
             </a:r>
             <a:endParaRPr lang="en-US" sz="4000" dirty="0"/>
           </a:p>
@@ -6144,7 +6144,7 @@
                 <a:ea typeface="Calibri" pitchFamily="34" charset="-122"/>
                 <a:cs typeface="Calibri" pitchFamily="34" charset="-120"/>
               </a:rPr>
-              <a:t>Fuzzy matching contributes one pair on the first join and 258 on the second. The rest is parsing the title properly: the season marker, the disambiguating year, the alternate-language name after " // ", and the acronym that IMDb spells without full stops.</a:t>
+              <a:t>Fuzzy matching contributes one pair on the first join and 284 on the second. The rest is parsing the title properly: the season marker, the disambiguating year, the alternate-language name after " // ", and the acronym that IMDb spells without full stops.</a:t>
             </a:r>
             <a:endParaRPr lang="en-US" sz="1200" dirty="0"/>
           </a:p>
@@ -6700,7 +6700,7 @@
                 <a:ea typeface="Calibri" pitchFamily="34" charset="-122"/>
                 <a:cs typeface="Calibri" pitchFamily="34" charset="-120"/>
               </a:rPr>
-              <a:t>24,902 titles · 92.2% with an IMDb id</a:t>
+              <a:t>24,902 titles · 92.7% with an IMDb id</a:t>
             </a:r>
             <a:endParaRPr lang="en-US" sz="1050" dirty="0"/>
           </a:p>
@@ -7601,7 +7601,7 @@
                 <a:ea typeface="Calibri" pitchFamily="34" charset="-122"/>
                 <a:cs typeface="Calibri" pitchFamily="34" charset="-120"/>
               </a:rPr>
-              <a:t>The raw correlation says otherwise — until size is held constant. n = 2,282.</a:t>
+              <a:t>The raw correlation says otherwise — until size is held constant. n = 2,292.</a:t>
             </a:r>
             <a:endParaRPr lang="en-US" sz="1350" dirty="0"/>
           </a:p>
@@ -7696,7 +7696,7 @@
                 <a:ea typeface="Calibri" pitchFamily="34" charset="-122"/>
                 <a:cs typeface="Calibri" pitchFamily="34" charset="-120"/>
               </a:rPr>
-              <a:t>95% interval -0.03 to 0.16 — it contains zero</a:t>
+              <a:t>95% interval -0.03 to 0.17 — it contains zero</a:t>
             </a:r>
             <a:endParaRPr lang="en-US" sz="1200" dirty="0"/>
           </a:p>

--- a/deliverables/streaming-engagement-deck.pptx
+++ b/deliverables/streaming-engagement-deck.pptx
@@ -4479,7 +4479,7 @@
                 <a:ea typeface="Calibri" pitchFamily="34" charset="-122"/>
                 <a:cs typeface="Calibri" pitchFamily="34" charset="-120"/>
               </a:rPr>
-              <a:t>Reproducible end to end: python -m src.match_report · src.model · src.analysis · src.dashboard. 75 tests. IMDb data used under its non-commercial terms. Interpretation drafted by the agent, 2026-09-27; the checkpoint decisions are Eileen's and are recorded in data/validation/.</a:t>
+              <a:t>Reproducible end to end: python -m src.match_report · src.model · src.analysis · src.dashboard. 82 tests. IMDb data used under its non-commercial terms. Interpretation drafted by the agent, 2026-09-27; the checkpoint decisions are Eileen's and are recorded in data/validation/.</a:t>
             </a:r>
             <a:endParaRPr lang="en-US" sz="1000" dirty="0"/>
           </a:p>
@@ -7696,7 +7696,7 @@
                 <a:ea typeface="Calibri" pitchFamily="34" charset="-122"/>
                 <a:cs typeface="Calibri" pitchFamily="34" charset="-120"/>
               </a:rPr>
-              <a:t>95% interval -0.03 to 0.17 — it contains zero</a:t>
+              <a:t>95% interval -0.03 to 0.16 — it contains zero</a:t>
             </a:r>
             <a:endParaRPr lang="en-US" sz="1200" dirty="0"/>
           </a:p>
